--- a/courses/learn_clustering/module03-01-multilevel-clustering/slides.pptx
+++ b/courses/learn_clustering/module03-01-multilevel-clustering/slides.pptx
@@ -515,12 +515,6 @@
               <a:t>Multilevel clustering coarsens, partitions, then refines. You’ll watch greedy coarsening to two clusters followed by FM polish—landing on cutsize three.</a:t>
             </a:r>
           </a:p>
-          <a:p/>
-          <a:p>
-            <a:r>
-              <a:t>&lt;!-- algorithm-walkthrough --&gt;</a:t>
-            </a:r>
-          </a:p>
         </p:txBody>
       </p:sp>
       <p:sp>
@@ -939,12 +933,6 @@
           <a:p>
             <a:r>
               <a:t>Coarsen for global structure, refine for local cut. Real placers nest this inside V-cycles with hyperedges and tighter balance — this lab is the skeleton.</a:t>
-            </a:r>
-          </a:p>
-          <a:p/>
-          <a:p>
-            <a:r>
-              <a:t>&lt;!-- /algorithm-walkthrough --&gt;</a:t>
             </a:r>
           </a:p>
         </p:txBody>
@@ -5793,7 +5781,7 @@
                 <a:spcPts val="2200"/>
               </a:lnSpc>
               <a:spcAft>
-                <a:spcPts val="600"/>
+                <a:spcPts val="400"/>
               </a:spcAft>
             </a:pPr>
             <a:r>
@@ -5812,7 +5800,7 @@
                 <a:spcPts val="2200"/>
               </a:lnSpc>
               <a:spcAft>
-                <a:spcPts val="600"/>
+                <a:spcPts val="400"/>
               </a:spcAft>
             </a:pPr>
             <a:r>
@@ -5822,7 +5810,7 @@
                 </a:solidFill>
                 <a:latin typeface="Consolas"/>
               </a:rPr>
-              <a:t/>
+              <a:t>python ../common/solvers.py examples/tiny_graph.json --mode</a:t>
             </a:r>
           </a:p>
           <a:p>
@@ -5831,7 +5819,7 @@
                 <a:spcPts val="2200"/>
               </a:lnSpc>
               <a:spcAft>
-                <a:spcPts val="600"/>
+                <a:spcPts val="400"/>
               </a:spcAft>
             </a:pPr>
             <a:r>
@@ -5841,7 +5829,7 @@
                 </a:solidFill>
                 <a:latin typeface="Consolas"/>
               </a:rPr>
-              <a:t>python ../common/solvers.py examples/tiny_graph.json --mode multilevel</a:t>
+              <a:t>multilevel</a:t>
             </a:r>
           </a:p>
         </p:txBody>
